--- a/Basic Java.pptx
+++ b/Basic Java.pptx
@@ -255,7 +255,7 @@
           <a:p>
             <a:fld id="{8FAF777D-AA10-4302-9FEE-E5B4EBC67278}" type="datetimeFigureOut">
               <a:rPr lang="en-US" smtClean="0"/>
-              <a:t>12/18/2025</a:t>
+              <a:t>12/31/2025</a:t>
             </a:fld>
             <a:endParaRPr lang="en-US"/>
           </a:p>
@@ -466,7 +466,7 @@
           <a:p>
             <a:fld id="{8FAF777D-AA10-4302-9FEE-E5B4EBC67278}" type="datetimeFigureOut">
               <a:rPr lang="en-US" smtClean="0"/>
-              <a:t>12/18/2025</a:t>
+              <a:t>12/31/2025</a:t>
             </a:fld>
             <a:endParaRPr lang="en-US"/>
           </a:p>
@@ -681,7 +681,7 @@
           <a:p>
             <a:fld id="{8FAF777D-AA10-4302-9FEE-E5B4EBC67278}" type="datetimeFigureOut">
               <a:rPr lang="en-US" smtClean="0"/>
-              <a:t>12/18/2025</a:t>
+              <a:t>12/31/2025</a:t>
             </a:fld>
             <a:endParaRPr lang="en-US"/>
           </a:p>
@@ -882,7 +882,7 @@
           <a:p>
             <a:fld id="{8FAF777D-AA10-4302-9FEE-E5B4EBC67278}" type="datetimeFigureOut">
               <a:rPr lang="en-US" smtClean="0"/>
-              <a:t>12/18/2025</a:t>
+              <a:t>12/31/2025</a:t>
             </a:fld>
             <a:endParaRPr lang="en-US"/>
           </a:p>
@@ -1161,7 +1161,7 @@
           <a:p>
             <a:fld id="{8FAF777D-AA10-4302-9FEE-E5B4EBC67278}" type="datetimeFigureOut">
               <a:rPr lang="en-US" smtClean="0"/>
-              <a:t>12/18/2025</a:t>
+              <a:t>12/31/2025</a:t>
             </a:fld>
             <a:endParaRPr lang="en-US"/>
           </a:p>
@@ -1429,7 +1429,7 @@
           <a:p>
             <a:fld id="{8FAF777D-AA10-4302-9FEE-E5B4EBC67278}" type="datetimeFigureOut">
               <a:rPr lang="en-US" smtClean="0"/>
-              <a:t>12/18/2025</a:t>
+              <a:t>12/31/2025</a:t>
             </a:fld>
             <a:endParaRPr lang="en-US"/>
           </a:p>
@@ -1845,7 +1845,7 @@
           <a:p>
             <a:fld id="{8FAF777D-AA10-4302-9FEE-E5B4EBC67278}" type="datetimeFigureOut">
               <a:rPr lang="en-US" smtClean="0"/>
-              <a:t>12/18/2025</a:t>
+              <a:t>12/31/2025</a:t>
             </a:fld>
             <a:endParaRPr lang="en-US"/>
           </a:p>
@@ -1994,7 +1994,7 @@
           <a:p>
             <a:fld id="{8FAF777D-AA10-4302-9FEE-E5B4EBC67278}" type="datetimeFigureOut">
               <a:rPr lang="en-US" smtClean="0"/>
-              <a:t>12/18/2025</a:t>
+              <a:t>12/31/2025</a:t>
             </a:fld>
             <a:endParaRPr lang="en-US"/>
           </a:p>
@@ -2120,7 +2120,7 @@
           <a:p>
             <a:fld id="{8FAF777D-AA10-4302-9FEE-E5B4EBC67278}" type="datetimeFigureOut">
               <a:rPr lang="en-US" smtClean="0"/>
-              <a:t>12/18/2025</a:t>
+              <a:t>12/31/2025</a:t>
             </a:fld>
             <a:endParaRPr lang="en-US"/>
           </a:p>
@@ -2371,7 +2371,7 @@
           <a:p>
             <a:fld id="{8FAF777D-AA10-4302-9FEE-E5B4EBC67278}" type="datetimeFigureOut">
               <a:rPr lang="en-US" smtClean="0"/>
-              <a:t>12/18/2025</a:t>
+              <a:t>12/31/2025</a:t>
             </a:fld>
             <a:endParaRPr lang="en-US"/>
           </a:p>
@@ -2816,7 +2816,7 @@
           <a:p>
             <a:fld id="{8FAF777D-AA10-4302-9FEE-E5B4EBC67278}" type="datetimeFigureOut">
               <a:rPr lang="en-US" smtClean="0"/>
-              <a:t>12/18/2025</a:t>
+              <a:t>12/31/2025</a:t>
             </a:fld>
             <a:endParaRPr lang="en-US"/>
           </a:p>
@@ -3143,7 +3143,7 @@
           <a:p>
             <a:fld id="{8FAF777D-AA10-4302-9FEE-E5B4EBC67278}" type="datetimeFigureOut">
               <a:rPr lang="en-US" smtClean="0"/>
-              <a:t>12/18/2025</a:t>
+              <a:t>12/31/2025</a:t>
             </a:fld>
             <a:endParaRPr lang="en-US"/>
           </a:p>
@@ -5746,14 +5746,14 @@
           <a:lstStyle/>
           <a:p>
             <a:r>
-              <a:rPr lang="en-US">
+              <a:rPr lang="en-US" sz="2200">
                 <a:latin typeface="Arial" panose="020B0604020202020204" pitchFamily="34" charset="0"/>
                 <a:cs typeface="Arial" panose="020B0604020202020204" pitchFamily="34" charset="0"/>
               </a:rPr>
               <a:t>jar</a:t>
             </a:r>
             <a:r>
-              <a:rPr lang="en-US" i="1">
+              <a:rPr lang="en-US" sz="2200" i="1">
                 <a:solidFill>
                   <a:schemeClr val="accent5"/>
                 </a:solidFill>
@@ -5763,21 +5763,21 @@
               <a:t>: </a:t>
             </a:r>
             <a:r>
-              <a:rPr lang="en-US" b="1">
+              <a:rPr lang="en-US" sz="2200" b="1">
                 <a:latin typeface="Arial" panose="020B0604020202020204" pitchFamily="34" charset="0"/>
                 <a:cs typeface="Arial" panose="020B0604020202020204" pitchFamily="34" charset="0"/>
               </a:rPr>
               <a:t>J</a:t>
             </a:r>
             <a:r>
-              <a:rPr lang="en-US">
+              <a:rPr lang="en-US" sz="2200">
                 <a:latin typeface="Arial" panose="020B0604020202020204" pitchFamily="34" charset="0"/>
                 <a:cs typeface="Arial" panose="020B0604020202020204" pitchFamily="34" charset="0"/>
               </a:rPr>
               <a:t>ava</a:t>
             </a:r>
             <a:r>
-              <a:rPr lang="en-US">
+              <a:rPr lang="en-US" sz="2200">
                 <a:solidFill>
                   <a:schemeClr val="accent5"/>
                 </a:solidFill>
@@ -5787,14 +5787,14 @@
               <a:t> </a:t>
             </a:r>
             <a:r>
-              <a:rPr lang="en-US" b="1">
+              <a:rPr lang="en-US" sz="2200" b="1">
                 <a:latin typeface="Arial" panose="020B0604020202020204" pitchFamily="34" charset="0"/>
                 <a:cs typeface="Arial" panose="020B0604020202020204" pitchFamily="34" charset="0"/>
               </a:rPr>
               <a:t>Ar</a:t>
             </a:r>
             <a:r>
-              <a:rPr lang="en-US">
+              <a:rPr lang="en-US" sz="2200">
                 <a:latin typeface="Arial" panose="020B0604020202020204" pitchFamily="34" charset="0"/>
                 <a:cs typeface="Arial" panose="020B0604020202020204" pitchFamily="34" charset="0"/>
               </a:rPr>
@@ -5804,35 +5804,24 @@
           <a:p>
             <a:pPr lvl="1"/>
             <a:r>
-              <a:rPr lang="en-US">
-                <a:latin typeface="Arial" panose="020B0604020202020204" pitchFamily="34" charset="0"/>
-                <a:cs typeface="Arial" panose="020B0604020202020204" pitchFamily="34" charset="0"/>
-              </a:rPr>
-              <a:t>Định dạng</a:t>
-            </a:r>
-            <a:r>
-              <a:rPr lang="en-US"/>
-              <a:t> </a:t>
-            </a:r>
-            <a:r>
-              <a:rPr lang="en-US">
-                <a:latin typeface="Arial" panose="020B0604020202020204" pitchFamily="34" charset="0"/>
-                <a:cs typeface="Arial" panose="020B0604020202020204" pitchFamily="34" charset="0"/>
-              </a:rPr>
-              <a:t>đóng gói các file class, resource và metadata của ứng dụng Java</a:t>
+              <a:rPr lang="en-US" sz="2000">
+                <a:latin typeface="Arial" panose="020B0604020202020204" pitchFamily="34" charset="0"/>
+                <a:cs typeface="Arial" panose="020B0604020202020204" pitchFamily="34" charset="0"/>
+              </a:rPr>
+              <a:t>Định dạng đóng gói các file class, resource và metadata của ứng dụng Java</a:t>
             </a:r>
           </a:p>
           <a:p>
             <a:pPr lvl="1"/>
             <a:r>
-              <a:rPr lang="en-US">
+              <a:rPr lang="en-US" sz="2000">
                 <a:latin typeface="Arial" panose="020B0604020202020204" pitchFamily="34" charset="0"/>
                 <a:cs typeface="Arial" panose="020B0604020202020204" pitchFamily="34" charset="0"/>
               </a:rPr>
               <a:t>JDK cung cấp tiện ích đi kèm là </a:t>
             </a:r>
             <a:r>
-              <a:rPr lang="en-US" i="1">
+              <a:rPr lang="en-US" sz="2000" i="1">
                 <a:solidFill>
                   <a:schemeClr val="accent5"/>
                 </a:solidFill>
@@ -5842,7 +5831,7 @@
               <a:t>jar</a:t>
             </a:r>
             <a:r>
-              <a:rPr lang="en-US">
+              <a:rPr lang="en-US" sz="2000">
                 <a:latin typeface="Arial" panose="020B0604020202020204" pitchFamily="34" charset="0"/>
                 <a:cs typeface="Arial" panose="020B0604020202020204" pitchFamily="34" charset="0"/>
               </a:rPr>
@@ -5851,7 +5840,7 @@
           </a:p>
           <a:p>
             <a:r>
-              <a:rPr lang="en-US">
+              <a:rPr lang="en-US" sz="2200">
                 <a:latin typeface="Arial" panose="020B0604020202020204" pitchFamily="34" charset="0"/>
                 <a:cs typeface="Arial" panose="020B0604020202020204" pitchFamily="34" charset="0"/>
               </a:rPr>
@@ -5860,7 +5849,7 @@
           </a:p>
           <a:p>
             <a:r>
-              <a:rPr lang="en-US">
+              <a:rPr lang="en-US" sz="2200">
                 <a:latin typeface="Arial" panose="020B0604020202020204" pitchFamily="34" charset="0"/>
                 <a:cs typeface="Arial" panose="020B0604020202020204" pitchFamily="34" charset="0"/>
               </a:rPr>
